--- a/dist/초1/환경·생태/생활습관/초1_환경·생태_생활습관_01_물·종이·전기아끼기.pptx
+++ b/dist/초1/환경·생태/생활습관/초1_환경·생태_생활습관_01_물·종이·전기아끼기.pptx
@@ -114,34 +114,34 @@
   <p:extLst>
     <p:ext uri="{521415D9-36F7-43E2-AB2F-B90AF26B5E84}">
       <p14:sectionLst xmlns:p14="http://schemas.microsoft.com/office/powerpoint/2010/main">
-        <p14:section name="도입" id="{a66994cc-c4b1-d4a2-1c00-42417e4e6593}">
+        <p14:section name="도입" id="{8fea15d1-2aa8-82e4-26b3-c45c6e08171d}">
           <p14:sldIdLst>
             <p14:sldId id="256"/>
             <p14:sldId id="257"/>
           </p14:sldIdLst>
         </p14:section>
-        <p14:section name="개념" id="{02e8786e-2451-7307-7211-93789ec18648}">
+        <p14:section name="개념" id="{53cdfd0c-bbbd-7a33-dab8-98f079faeca9}">
           <p14:sldIdLst>
             <p14:sldId id="258"/>
           </p14:sldIdLst>
         </p14:section>
-        <p14:section name="연습" id="{13d97ac3-0d44-6e19-a93f-0548539b32b1}">
+        <p14:section name="연습" id="{517f8fd8-12c2-7838-42e3-b3f36c0e385a}">
           <p14:sldIdLst>
             <p14:sldId id="259"/>
             <p14:sldId id="260"/>
           </p14:sldIdLst>
         </p14:section>
-        <p14:section name="확인" id="{78bdd42c-6a40-f6e0-98c7-8436e9517dfe}">
+        <p14:section name="확인" id="{177f32b0-c420-a9e0-2f43-275203a2e7a7}">
           <p14:sldIdLst>
             <p14:sldId id="261"/>
           </p14:sldIdLst>
         </p14:section>
-        <p14:section name="정리" id="{2b5427ca-ceac-411a-4564-15b5a8e593ba}">
+        <p14:section name="정리" id="{2c09359e-36aa-88ba-1999-b2f32a739ec6}">
           <p14:sldIdLst>
             <p14:sldId id="262"/>
           </p14:sldIdLst>
         </p14:section>
-        <p14:section name="보충" id="{2d87b129-edaa-86ff-1a69-a8e2ba1c112c}">
+        <p14:section name="보충" id="{e8137866-25a6-e505-96f7-20ad8af50793}">
           <p14:sldIdLst>
             <p14:sldId id="263"/>
           </p14:sldIdLst>
